--- a/Comeback_Campaign_Engine_Presentation.pptx
+++ b/Comeback_Campaign_Engine_Presentation.pptx
@@ -2934,7 +2934,7 @@
                 <a:ea typeface="Calibri" pitchFamily="34" charset="-122"/>
                 <a:cs typeface="Calibri" pitchFamily="34" charset="-120"/>
               </a:rPr>
-              <a:t>Skill: planner_skill.md</a:t>
+              <a:t>Skill: planner-skill</a:t>
             </a:r>
             <a:endParaRPr lang="en-US" sz="1400" dirty="0"/>
           </a:p>
@@ -3098,7 +3098,7 @@
                 <a:ea typeface="Calibri" pitchFamily="34" charset="-122"/>
                 <a:cs typeface="Calibri" pitchFamily="34" charset="-120"/>
               </a:rPr>
-              <a:t>Skill: execution_skill.md</a:t>
+              <a:t>Skill: execution-skill</a:t>
             </a:r>
             <a:endParaRPr lang="en-US" sz="1400" dirty="0"/>
           </a:p>
@@ -3262,7 +3262,7 @@
                 <a:ea typeface="Calibri" pitchFamily="34" charset="-122"/>
                 <a:cs typeface="Calibri" pitchFamily="34" charset="-120"/>
               </a:rPr>
-              <a:t>Skill: review_compliance_skill.md</a:t>
+              <a:t>Skill: review-compliance-skill</a:t>
             </a:r>
             <a:endParaRPr lang="en-US" sz="1400" dirty="0"/>
           </a:p>
@@ -3600,7 +3600,7 @@
                 <a:ea typeface="Georgia" pitchFamily="34" charset="-122"/>
                 <a:cs typeface="Georgia" pitchFamily="34" charset="-120"/>
               </a:rPr>
-              <a:t>planner_skill.md</a:t>
+              <a:t>planner-skill</a:t>
             </a:r>
             <a:endParaRPr lang="en-US" sz="1500" dirty="0"/>
           </a:p>
@@ -3795,7 +3795,7 @@
                 <a:ea typeface="Georgia" pitchFamily="34" charset="-122"/>
                 <a:cs typeface="Georgia" pitchFamily="34" charset="-120"/>
               </a:rPr>
-              <a:t>execution_skill.md</a:t>
+              <a:t>execution-skill</a:t>
             </a:r>
             <a:endParaRPr lang="en-US" sz="1500" dirty="0"/>
           </a:p>
@@ -3990,7 +3990,7 @@
                 <a:ea typeface="Georgia" pitchFamily="34" charset="-122"/>
                 <a:cs typeface="Georgia" pitchFamily="34" charset="-120"/>
               </a:rPr>
-              <a:t>review_compliance_skill.md</a:t>
+              <a:t>review-compliance-skill</a:t>
             </a:r>
             <a:endParaRPr lang="en-US" sz="1500" dirty="0"/>
           </a:p>
